--- a/1203/모바일앱프로젝트.pptx
+++ b/1203/모바일앱프로젝트.pptx
@@ -116,6 +116,11 @@
       </a:defRPr>
     </a:lvl9pPr>
   </p:defaultTextStyle>
+  <p:extLst>
+    <p:ext uri="{EFAFB233-063F-42B5-8137-9DF3F51BA10A}">
+      <p15:sldGuideLst xmlns:p15="http://schemas.microsoft.com/office/powerpoint/2012/main"/>
+    </p:ext>
+  </p:extLst>
 </p:presentation>
 </file>
 
@@ -3009,12 +3014,65 @@
             <p:ph type="subTitle" idx="1"/>
           </p:nvPr>
         </p:nvSpPr>
-        <p:spPr/>
-        <p:txBody>
-          <a:bodyPr/>
-          <a:lstStyle/>
-          <a:p>
-            <a:endParaRPr lang="ko-KR" altLang="en-US"/>
+        <p:spPr>
+          <a:xfrm>
+            <a:off x="1611464" y="3665649"/>
+            <a:ext cx="9144000" cy="1655762"/>
+          </a:xfrm>
+        </p:spPr>
+        <p:txBody>
+          <a:bodyPr>
+            <a:normAutofit lnSpcReduction="10000"/>
+          </a:bodyPr>
+          <a:lstStyle/>
+          <a:p>
+            <a:r>
+              <a:rPr lang="en-US" altLang="ko-KR" dirty="0" smtClean="0">
+                <a:hlinkClick r:id="rId2"/>
+              </a:rPr>
+              <a:t>https</a:t>
+            </a:r>
+            <a:r>
+              <a:rPr lang="en-US" altLang="ko-KR" dirty="0">
+                <a:hlinkClick r:id="rId2"/>
+              </a:rPr>
+              <a:t>://</a:t>
+            </a:r>
+            <a:r>
+              <a:rPr lang="en-US" altLang="ko-KR" dirty="0" smtClean="0">
+                <a:hlinkClick r:id="rId2"/>
+              </a:rPr>
+              <a:t>github.com/mipotapota/hybrid</a:t>
+            </a:r>
+            <a:endParaRPr lang="en-US" altLang="ko-KR" dirty="0" smtClean="0"/>
+          </a:p>
+          <a:p>
+            <a:endParaRPr lang="en-US" altLang="ko-KR" dirty="0" smtClean="0"/>
+          </a:p>
+          <a:p>
+            <a:r>
+              <a:rPr lang="en-US" altLang="ko-KR" dirty="0"/>
+              <a:t>	</a:t>
+            </a:r>
+            <a:r>
+              <a:rPr lang="en-US" altLang="ko-KR" dirty="0" smtClean="0"/>
+              <a:t>						</a:t>
+            </a:r>
+          </a:p>
+          <a:p>
+            <a:r>
+              <a:rPr lang="en-US" altLang="ko-KR"/>
+              <a:t>	</a:t>
+            </a:r>
+            <a:r>
+              <a:rPr lang="en-US" altLang="ko-KR" smtClean="0"/>
+              <a:t>						201823886</a:t>
+            </a:r>
+            <a:r>
+              <a:rPr lang="ko-KR" altLang="en-US" dirty="0" err="1" smtClean="0"/>
+              <a:t>김산</a:t>
+            </a:r>
+            <a:endParaRPr lang="ko-KR" altLang="en-US" dirty="0"/>
           </a:p>
         </p:txBody>
       </p:sp>
@@ -3028,6 +3086,13 @@
   <p:clrMapOvr>
     <a:masterClrMapping/>
   </p:clrMapOvr>
+  <p:timing>
+    <p:tnLst>
+      <p:par>
+        <p:cTn id="1" dur="indefinite" restart="never" nodeType="tmRoot"/>
+      </p:par>
+    </p:tnLst>
+  </p:timing>
 </p:sld>
 </file>
 
@@ -3567,6 +3632,13 @@
   <p:clrMapOvr>
     <a:masterClrMapping/>
   </p:clrMapOvr>
+  <p:timing>
+    <p:tnLst>
+      <p:par>
+        <p:cTn id="1" dur="indefinite" restart="never" nodeType="tmRoot"/>
+      </p:par>
+    </p:tnLst>
+  </p:timing>
 </p:sld>
 </file>
 
